--- a/deliverables/Invoice-Audit-Agent-Resumen.pptx
+++ b/deliverables/Invoice-Audit-Agent-Resumen.pptx
@@ -4,9 +4,6 @@
   <p:sldMasterIdLst>
     <p:sldMasterId id="2147483648" r:id="rId1"/>
   </p:sldMasterIdLst>
-  <p:notesMasterIdLst>
-    <p:notesMasterId r:id="rId9"/>
-  </p:notesMasterIdLst>
   <p:sldIdLst>
     <p:sldId id="256" r:id="rId2"/>
     <p:sldId id="257" r:id="rId3"/>
@@ -14,8 +11,13 @@
     <p:sldId id="259" r:id="rId5"/>
     <p:sldId id="260" r:id="rId6"/>
     <p:sldId id="261" r:id="rId7"/>
+    <p:sldId id="263" r:id="rId14"/>
+    <p:sldId id="264" r:id="rId15"/>
     <p:sldId id="262" r:id="rId8"/>
   </p:sldIdLst>
+  <p:notesMasterIdLst>
+    <p:notesMasterId r:id="rId9"/>
+  </p:notesMasterIdLst>
   <p:sldSz cx="12192000" cy="6858000"/>
   <p:notesSz cx="6858000" cy="12192000"/>
   <p:defaultTextStyle>
@@ -507,10 +509,8 @@
           <a:lstStyle/>
           <a:p>
             <a:r>
-              <a:rPr lang="en-US" dirty="0"/>
-              <a:t/>
-            </a:r>
-            <a:endParaRPr lang="en-US" dirty="0"/>
+              <a:t>APERTURA. Menciona que esta demo corre en un tenant propio, 100% real — no es un mockup ni datos sintéticos. Resalta: 'Build, Observe, Tune' es el ciclo de vida completo de un agente en producción, y lo vamos a recorrer de principio a fin con un caso de uso real de auditoría de facturas. Pausa breve para presentarte y marcar el tiempo esperado (~20-25 min).</a:t>
+            </a:r>
           </a:p>
         </p:txBody>
       </p:sp>
@@ -595,10 +595,8 @@
           <a:lstStyle/>
           <a:p>
             <a:r>
-              <a:rPr lang="en-US" dirty="0"/>
-              <a:t/>
-            </a:r>
-            <a:endParaRPr lang="en-US" dirty="0"/>
+              <a:t>AGENDA. Da el mapa de los 6 pasos antes de entrar al detalle, para que el cliente sepa qué viene y no se pierda. Resalta que terminamos con un resultado cuantificado real (paso 6), no una demo abstracta — eso ancla la atención desde el inicio.</a:t>
+            </a:r>
           </a:p>
         </p:txBody>
       </p:sp>
@@ -683,10 +681,8 @@
           <a:lstStyle/>
           <a:p>
             <a:r>
-              <a:rPr lang="en-US" dirty="0"/>
-              <a:t/>
-            </a:r>
-            <a:endParaRPr lang="en-US" dirty="0"/>
+              <a:t>CASO DE USO. Cuenta el problema de negocio ANTES de mostrar el agente: el contrato MSA exige aprobación previa por escrito para horas extra, y hoy ese cruce se hace a mano. Resalta el hallazgo real: $8,342.25 en 227 horas sin aprobación, citando la Sección 3.2(c) del contrato — enfatiza que este número NO está inventado, salió de una ejecución real del agente que vamos a mostrar a continuación.</a:t>
+            </a:r>
           </a:p>
         </p:txBody>
       </p:sp>
@@ -771,10 +767,8 @@
           <a:lstStyle/>
           <a:p>
             <a:r>
-              <a:rPr lang="en-US" dirty="0"/>
-              <a:t/>
-            </a:r>
-            <a:endParaRPr lang="en-US" dirty="0"/>
+              <a:t>BUILD &amp; GROUND. Si el tiempo lo permite, abre el Playground en vivo aquí (ver guion completo / cheat sheet para la URL exacta). Resalta 3 cosas: (1) el modelo desplegado, (2) las instrucciones del agente son texto en lenguaje natural, no código, (3) el conocimiento viene de documentos reales indexados — no hay alucinación ni contenido genérico de internet.</a:t>
+            </a:r>
           </a:p>
         </p:txBody>
       </p:sp>
@@ -859,10 +853,8 @@
           <a:lstStyle/>
           <a:p>
             <a:r>
-              <a:rPr lang="en-US" dirty="0"/>
-              <a:t/>
-            </a:r>
-            <a:endParaRPr lang="en-US" dirty="0"/>
+              <a:t>OBSERVE. Dos pantallas en una: Traces (trazabilidad) y Monitor (costo). Lanza la pregunta retórica: '¿de dónde salió este número?' y respóndela: aquí, en segundos, con el log completo paso a paso. Aclara que el costo mostrado ($0.32, 25.3K tokens) es de ESTA demo real, medido por Azure — no un estimado de folleto.</a:t>
+            </a:r>
           </a:p>
         </p:txBody>
       </p:sp>
@@ -947,10 +939,8 @@
           <a:lstStyle/>
           <a:p>
             <a:r>
-              <a:rPr lang="en-US" dirty="0"/>
-              <a:t/>
-            </a:r>
-            <a:endParaRPr lang="en-US" dirty="0"/>
+              <a:t>TUNE. El evaluador se genera por IA a partir de una instrucción en lenguaje natural — no es un checklist hardcodeado a mano. Resalta: 100% de las ejecuciones pasaron las 2 dimensiones de calidad, evaluadas sobre tráfico real, no datos sintéticos de prueba.</a:t>
+            </a:r>
           </a:p>
         </p:txBody>
       </p:sp>
@@ -1035,10 +1025,8 @@
           <a:lstStyle/>
           <a:p>
             <a:r>
-              <a:rPr lang="en-US" dirty="0"/>
-              <a:t/>
-            </a:r>
-            <a:endParaRPr lang="en-US" dirty="0"/>
+              <a:t>CIERRE. Repite las 3 palabras clave (Build, Observe, Tune) y refuerza que todo ocurrió dentro de Microsoft Foundry, sin exportar datos ni usar herramientas de terceros. Pausa aquí para preguntas. Si el cliente pregunta por seguridad/gobierno de agentes, ese es el gancho para pasar al Capítulo 3 (ver guion completo en el repo) — no está incluido en este deck de resumen.</a:t>
+            </a:r>
           </a:p>
         </p:txBody>
       </p:sp>
@@ -1071,6 +1059,146 @@
         <p14:creationId xmlns:p14="http://schemas.microsoft.com/office/powerpoint/2010/main" val="1024086991"/>
       </p:ext>
     </p:extLst>
+  </p:cSld>
+  <p:clrMapOvr>
+    <a:masterClrMapping/>
+  </p:clrMapOvr>
+</p:notes>
+</file>
+
+<file path=ppt/notesSlides/notesSlide8.xml><?xml version="1.0" encoding="utf-8"?>
+<p:notes xmlns:a="http://schemas.openxmlformats.org/drawingml/2006/main" xmlns:p="http://schemas.openxmlformats.org/presentationml/2006/main" xmlns:r="http://schemas.openxmlformats.org/officeDocument/2006/relationships">
+  <p:cSld>
+    <p:spTree>
+      <p:nvGrpSpPr>
+        <p:cNvPr id="1" name=""/>
+        <p:cNvGrpSpPr/>
+        <p:nvPr/>
+      </p:nvGrpSpPr>
+      <p:grpSpPr>
+        <a:xfrm>
+          <a:off x="0" y="0"/>
+          <a:ext cx="0" cy="0"/>
+          <a:chOff x="0" y="0"/>
+          <a:chExt cx="0" cy="0"/>
+        </a:xfrm>
+      </p:grpSpPr>
+      <p:sp>
+        <p:nvSpPr>
+          <p:cNvPr id="2" name="Slide Image Placeholder 1"/>
+          <p:cNvSpPr>
+            <a:spLocks noGrp="1"/>
+          </p:cNvSpPr>
+          <p:nvPr>
+            <p:ph type="sldImg" idx="2"/>
+          </p:nvPr>
+        </p:nvSpPr>
+        <p:spPr/>
+      </p:sp>
+      <p:sp>
+        <p:nvSpPr>
+          <p:cNvPr id="3" name="Notes Placeholder 2"/>
+          <p:cNvSpPr>
+            <a:spLocks noGrp="1"/>
+          </p:cNvSpPr>
+          <p:nvPr>
+            <p:ph type="body" idx="3" sz="quarter"/>
+          </p:nvPr>
+        </p:nvSpPr>
+        <p:spPr/>
+        <p:txBody>
+          <a:bodyPr/>
+          <a:lstStyle/>
+          <a:p>
+            <a:r>
+              <a:t>PREVIEW VS. GA (nueva). Sé transparente proactivamente — mejor que lo digas tú a que el cliente lo descubra después. Mensaje clave: las piezas en Preview (Foundry IQ API, Insights/Workflows, Evaluations, creación manual de identidades, red teaming programado) no tienen SLA todavía y pueden cambiar antes de llegar a disponibilidad general — son perfectas para pilotar HOY, pero no para comprometer una fecha de producción firme sobre ellas. Todo lo demás (Playground, Traces, Monitor, Entra ID Agents, Defender for Cloud) ya es GA y estable. Si preguntan por fechas de GA, ofrece dar seguimiento en vez de prometer una fecha en el momento.</a:t>
+            </a:r>
+          </a:p>
+        </p:txBody>
+      </p:sp>
+      <p:sp>
+        <p:nvSpPr>
+          <p:cNvPr id="4" name="Slide Number Placeholder 3"/>
+          <p:cNvSpPr>
+            <a:spLocks noGrp="1"/>
+          </p:cNvSpPr>
+          <p:nvPr>
+            <p:ph type="sldNum" idx="5" sz="quarter"/>
+          </p:nvPr>
+        </p:nvSpPr>
+        <p:spPr/>
+      </p:sp>
+    </p:spTree>
+  </p:cSld>
+  <p:clrMapOvr>
+    <a:masterClrMapping/>
+  </p:clrMapOvr>
+</p:notes>
+</file>
+
+<file path=ppt/notesSlides/notesSlide9.xml><?xml version="1.0" encoding="utf-8"?>
+<p:notes xmlns:a="http://schemas.openxmlformats.org/drawingml/2006/main" xmlns:p="http://schemas.openxmlformats.org/presentationml/2006/main" xmlns:r="http://schemas.openxmlformats.org/officeDocument/2006/relationships">
+  <p:cSld>
+    <p:spTree>
+      <p:nvGrpSpPr>
+        <p:cNvPr id="1" name=""/>
+        <p:cNvGrpSpPr/>
+        <p:nvPr/>
+      </p:nvGrpSpPr>
+      <p:grpSpPr>
+        <a:xfrm>
+          <a:off x="0" y="0"/>
+          <a:ext cx="0" cy="0"/>
+          <a:chOff x="0" y="0"/>
+          <a:chExt cx="0" cy="0"/>
+        </a:xfrm>
+      </p:grpSpPr>
+      <p:sp>
+        <p:nvSpPr>
+          <p:cNvPr id="2" name="Slide Image Placeholder 1"/>
+          <p:cNvSpPr>
+            <a:spLocks noGrp="1"/>
+          </p:cNvSpPr>
+          <p:nvPr>
+            <p:ph type="sldImg" idx="2"/>
+          </p:nvPr>
+        </p:nvSpPr>
+        <p:spPr/>
+      </p:sp>
+      <p:sp>
+        <p:nvSpPr>
+          <p:cNvPr id="3" name="Notes Placeholder 2"/>
+          <p:cNvSpPr>
+            <a:spLocks noGrp="1"/>
+          </p:cNvSpPr>
+          <p:nvPr>
+            <p:ph type="body" idx="3" sz="quarter"/>
+          </p:nvPr>
+        </p:nvSpPr>
+        <p:spPr/>
+        <p:txBody>
+          <a:bodyPr/>
+          <a:lstStyle/>
+          <a:p>
+            <a:r>
+              <a:t>COSTO ESTIMADO (nueva). Divide la conversación en dos partes, sin mezclar lo seguro con lo incierto. Izquierda (blanco): el costo POR EJECUCIÓN que medimos nosotros mismos en los Traces de esta demo real — $0.012 promedio, proyectado a $0.60/mes con 50 facturas o $24/mes con 2,000. Esto es defendible: es Azure facturándonos a nosotros, no un número de catálogo. Derecha (navy): todo lo que depende del volumen o tier que el cliente elija (Azure AI Search, Application Insights, el plan 'AI' de Defender for Cloud) — aquí NO des un número exacto en la reunión. Ofrece armar la cotización juntos con la calculadora oficial de precios de Azure como siguiente paso, una vez que sepamos su volumen real esperado. Menciona que Defender for Cloud (plan AI) es gratis los primeros 30 días — ya lo estamos usando así en este tenant.</a:t>
+            </a:r>
+          </a:p>
+        </p:txBody>
+      </p:sp>
+      <p:sp>
+        <p:nvSpPr>
+          <p:cNvPr id="4" name="Slide Number Placeholder 3"/>
+          <p:cNvSpPr>
+            <a:spLocks noGrp="1"/>
+          </p:cNvSpPr>
+          <p:nvPr>
+            <p:ph type="sldNum" idx="5" sz="quarter"/>
+          </p:nvPr>
+        </p:nvSpPr>
+        <p:spPr/>
+      </p:sp>
+    </p:spTree>
   </p:cSld>
   <p:clrMapOvr>
     <a:masterClrMapping/>
@@ -5558,6 +5686,1404 @@
 
 <file path=ppt/slides/slide7.xml><?xml version="1.0" encoding="utf-8"?>
 <p:sld xmlns:a="http://schemas.openxmlformats.org/drawingml/2006/main" xmlns:r="http://schemas.openxmlformats.org/officeDocument/2006/relationships" xmlns:p="http://schemas.openxmlformats.org/presentationml/2006/main">
+  <p:cSld name="Slide 4">
+    <p:bg>
+      <p:bgPr>
+        <a:solidFill>
+          <a:srgbClr val="FFFFFF"/>
+        </a:solidFill>
+      </p:bgPr>
+    </p:bg>
+    <p:spTree>
+      <p:nvGrpSpPr>
+        <p:cNvPr id="1" name=""/>
+        <p:cNvGrpSpPr/>
+        <p:nvPr/>
+      </p:nvGrpSpPr>
+      <p:grpSpPr>
+        <a:xfrm>
+          <a:off x="0" y="0"/>
+          <a:ext cx="0" cy="0"/>
+          <a:chOff x="0" y="0"/>
+          <a:chExt cx="0" cy="0"/>
+        </a:xfrm>
+      </p:grpSpPr>
+      <p:sp>
+        <p:nvSpPr>
+          <p:cNvPr id="2" name="Text 0"/>
+          <p:cNvSpPr/>
+          <p:nvPr/>
+        </p:nvSpPr>
+        <p:spPr>
+          <a:xfrm>
+            <a:off x="548640" y="411480"/>
+            <a:ext cx="8229600" cy="320040"/>
+          </a:xfrm>
+          <a:prstGeom prst="rect">
+            <a:avLst/>
+          </a:prstGeom>
+          <a:noFill/>
+          <a:ln/>
+        </p:spPr>
+        <p:txBody>
+          <a:bodyPr wrap="square" lIns="0" tIns="0" rIns="0" bIns="0" rtlCol="0" anchor="ctr"/>
+          <a:lstStyle/>
+          <a:p>
+            <a:pPr indent="0" marL="0">
+              <a:buNone/>
+            </a:pPr>
+            <a:r>
+              <a:rPr lang="en-US" sz="1100" spc="100" kern="0" dirty="0">
+                <a:solidFill>
+                  <a:srgbClr val="0078D4"/>
+                </a:solidFill>
+                <a:latin typeface="Segoe UI" pitchFamily="34" charset="0"/>
+                <a:ea typeface="Segoe UI" pitchFamily="34" charset="-122"/>
+                <a:cs typeface="Segoe UI" pitchFamily="34" charset="-120"/>
+              </a:rPr>
+              <a:t>MADUREZ DE LAS FUNCIONALIDADES</a:t>
+            </a:r>
+            <a:endParaRPr lang="en-US" sz="1100" dirty="0"/>
+          </a:p>
+        </p:txBody>
+      </p:sp>
+      <p:sp>
+        <p:nvSpPr>
+          <p:cNvPr id="3" name="Text 1"/>
+          <p:cNvSpPr/>
+          <p:nvPr/>
+        </p:nvSpPr>
+        <p:spPr>
+          <a:xfrm>
+            <a:off x="548640" y="777240"/>
+            <a:ext cx="10058400" cy="640080"/>
+          </a:xfrm>
+          <a:prstGeom prst="rect">
+            <a:avLst/>
+          </a:prstGeom>
+          <a:noFill/>
+          <a:ln/>
+        </p:spPr>
+        <p:txBody>
+          <a:bodyPr wrap="square" lIns="0" tIns="0" rIns="0" bIns="0" rtlCol="0" anchor="ctr"/>
+          <a:lstStyle/>
+          <a:p>
+            <a:pPr indent="0" marL="0">
+              <a:buNone/>
+            </a:pPr>
+            <a:r>
+              <a:rPr lang="en-US" sz="2800" b="1" dirty="0">
+                <a:solidFill>
+                  <a:srgbClr val="0A2C6E"/>
+                </a:solidFill>
+                <a:latin typeface="Segoe UI" pitchFamily="34" charset="0"/>
+                <a:ea typeface="Segoe UI" pitchFamily="34" charset="-122"/>
+                <a:cs typeface="Segoe UI" pitchFamily="34" charset="-120"/>
+              </a:rPr>
+              <a:t>Qué está en Preview y qué ya es GA</a:t>
+            </a:r>
+            <a:endParaRPr lang="en-US" sz="2800" dirty="0"/>
+          </a:p>
+        </p:txBody>
+      </p:sp>
+      <p:sp>
+        <p:nvSpPr>
+          <p:cNvPr id="4" name="Text 2"/>
+          <p:cNvSpPr/>
+          <p:nvPr/>
+        </p:nvSpPr>
+        <p:spPr>
+          <a:xfrm>
+            <a:off x="548640" y="1371600"/>
+            <a:ext cx="10058400" cy="457200"/>
+          </a:xfrm>
+          <a:prstGeom prst="rect">
+            <a:avLst/>
+          </a:prstGeom>
+          <a:noFill/>
+          <a:ln/>
+        </p:spPr>
+        <p:txBody>
+          <a:bodyPr wrap="square" lIns="0" tIns="0" rIns="0" bIns="0" rtlCol="0" anchor="ctr"/>
+          <a:lstStyle/>
+          <a:p>
+            <a:pPr indent="0" marL="0">
+              <a:buNone/>
+            </a:pPr>
+            <a:r>
+              <a:rPr lang="en-US" sz="1500" dirty="0">
+                <a:solidFill>
+                  <a:srgbClr val="404040"/>
+                </a:solidFill>
+                <a:latin typeface="Segoe UI" pitchFamily="34" charset="0"/>
+                <a:ea typeface="Segoe UI" pitchFamily="34" charset="-122"/>
+                <a:cs typeface="Segoe UI" pitchFamily="34" charset="-120"/>
+              </a:rPr>
+              <a:t>Para planificar el rollout con el cliente sin sorpresas de disponibilidad o soporte</a:t>
+            </a:r>
+            <a:endParaRPr lang="en-US" sz="1500" dirty="0"/>
+          </a:p>
+        </p:txBody>
+      </p:sp>
+      <p:sp>
+        <p:nvSpPr>
+          <p:cNvPr id="5" name="Shape 3"/>
+          <p:cNvSpPr/>
+          <p:nvPr/>
+        </p:nvSpPr>
+        <p:spPr>
+          <a:xfrm>
+            <a:off x="548640" y="2103120"/>
+            <a:ext cx="3429000" cy="82296"/>
+          </a:xfrm>
+          <a:prstGeom prst="roundRect">
+            <a:avLst/>
+          </a:prstGeom>
+          <a:solidFill>
+            <a:srgbClr val="0078D4"/>
+          </a:solidFill>
+          <a:ln/>
+        </p:spPr>
+      </p:sp>
+      <p:sp>
+        <p:nvSpPr>
+          <p:cNvPr id="6" name="Text 4"/>
+          <p:cNvSpPr/>
+          <p:nvPr/>
+        </p:nvSpPr>
+        <p:spPr>
+          <a:xfrm>
+            <a:off x="548640" y="2331720"/>
+            <a:ext cx="3429000" cy="457200"/>
+          </a:xfrm>
+          <a:prstGeom prst="rect">
+            <a:avLst/>
+          </a:prstGeom>
+          <a:noFill/>
+          <a:ln/>
+        </p:spPr>
+        <p:txBody>
+          <a:bodyPr wrap="square" lIns="0" tIns="0" rIns="0" bIns="0" rtlCol="0" anchor="ctr"/>
+          <a:lstStyle/>
+          <a:p>
+            <a:pPr indent="0" marL="0">
+              <a:buNone/>
+            </a:pPr>
+            <a:r>
+              <a:rPr lang="en-US" sz="1600" b="1" dirty="0">
+                <a:solidFill>
+                  <a:srgbClr val="1A1A1A"/>
+                </a:solidFill>
+                <a:latin typeface="Segoe UI" pitchFamily="34" charset="0"/>
+                <a:ea typeface="Segoe UI" pitchFamily="34" charset="-122"/>
+                <a:cs typeface="Segoe UI" pitchFamily="34" charset="-120"/>
+              </a:rPr>
+              <a:t>En Preview</a:t>
+            </a:r>
+            <a:endParaRPr lang="en-US" sz="1600" dirty="0"/>
+          </a:p>
+        </p:txBody>
+      </p:sp>
+      <p:sp>
+        <p:nvSpPr>
+          <p:cNvPr id="7" name="Text 5"/>
+          <p:cNvSpPr/>
+          <p:nvPr/>
+        </p:nvSpPr>
+        <p:spPr>
+          <a:xfrm>
+            <a:off x="548640" y="2788920"/>
+            <a:ext cx="3429000" cy="1371600"/>
+          </a:xfrm>
+          <a:prstGeom prst="rect">
+            <a:avLst/>
+          </a:prstGeom>
+          <a:noFill/>
+          <a:ln/>
+        </p:spPr>
+        <p:txBody>
+          <a:bodyPr wrap="square" lIns="0" tIns="0" rIns="0" bIns="0" rtlCol="0" anchor="ctr"/>
+          <a:lstStyle/>
+          <a:p>
+            <a:pPr indent="0" marL="0">
+              <a:buNone/>
+            </a:pPr>
+            <a:r>
+              <a:rPr lang="en-US" sz="1250" dirty="0">
+                <a:solidFill>
+                  <a:srgbClr val="404040"/>
+                </a:solidFill>
+                <a:latin typeface="Segoe UI" pitchFamily="34" charset="0"/>
+                <a:ea typeface="Segoe UI" pitchFamily="34" charset="-122"/>
+                <a:cs typeface="Segoe UI" pitchFamily="34" charset="-120"/>
+              </a:rPr>
+              <a:t>Foundry IQ / Knowledge Bases (API 2026-08-01-preview) · pestañas Insights y Workflows del agente · Evaluations · creación manual de identidades de agente en Entra · Scheduled red teaming.</a:t>
+            </a:r>
+            <a:endParaRPr lang="en-US" sz="1250" dirty="0"/>
+          </a:p>
+        </p:txBody>
+      </p:sp>
+      <p:sp>
+        <p:nvSpPr>
+          <p:cNvPr id="8" name="Shape 6"/>
+          <p:cNvSpPr/>
+          <p:nvPr/>
+        </p:nvSpPr>
+        <p:spPr>
+          <a:xfrm>
+            <a:off x="4251960" y="2103120"/>
+            <a:ext cx="3429000" cy="82296"/>
+          </a:xfrm>
+          <a:prstGeom prst="roundRect">
+            <a:avLst/>
+          </a:prstGeom>
+          <a:solidFill>
+            <a:srgbClr val="0078D4"/>
+          </a:solidFill>
+          <a:ln/>
+        </p:spPr>
+      </p:sp>
+      <p:sp>
+        <p:nvSpPr>
+          <p:cNvPr id="9" name="Text 7"/>
+          <p:cNvSpPr/>
+          <p:nvPr/>
+        </p:nvSpPr>
+        <p:spPr>
+          <a:xfrm>
+            <a:off x="4251960" y="2331720"/>
+            <a:ext cx="3429000" cy="457200"/>
+          </a:xfrm>
+          <a:prstGeom prst="rect">
+            <a:avLst/>
+          </a:prstGeom>
+          <a:noFill/>
+          <a:ln/>
+        </p:spPr>
+        <p:txBody>
+          <a:bodyPr wrap="square" lIns="0" tIns="0" rIns="0" bIns="0" rtlCol="0" anchor="ctr"/>
+          <a:lstStyle/>
+          <a:p>
+            <a:pPr indent="0" marL="0">
+              <a:buNone/>
+            </a:pPr>
+            <a:r>
+              <a:rPr lang="en-US" sz="1600" b="1" dirty="0">
+                <a:solidFill>
+                  <a:srgbClr val="1A1A1A"/>
+                </a:solidFill>
+                <a:latin typeface="Segoe UI" pitchFamily="34" charset="0"/>
+                <a:ea typeface="Segoe UI" pitchFamily="34" charset="-122"/>
+                <a:cs typeface="Segoe UI" pitchFamily="34" charset="-120"/>
+              </a:rPr>
+              <a:t>Ya disponible (GA)</a:t>
+            </a:r>
+            <a:endParaRPr lang="en-US" sz="1600" dirty="0"/>
+          </a:p>
+        </p:txBody>
+      </p:sp>
+      <p:sp>
+        <p:nvSpPr>
+          <p:cNvPr id="10" name="Text 8"/>
+          <p:cNvSpPr/>
+          <p:nvPr/>
+        </p:nvSpPr>
+        <p:spPr>
+          <a:xfrm>
+            <a:off x="4251960" y="2788920"/>
+            <a:ext cx="3429000" cy="1371600"/>
+          </a:xfrm>
+          <a:prstGeom prst="rect">
+            <a:avLst/>
+          </a:prstGeom>
+          <a:noFill/>
+          <a:ln/>
+        </p:spPr>
+        <p:txBody>
+          <a:bodyPr wrap="square" lIns="0" tIns="0" rIns="0" bIns="0" rtlCol="0" anchor="ctr"/>
+          <a:lstStyle/>
+          <a:p>
+            <a:pPr indent="0" marL="0">
+              <a:buNone/>
+            </a:pPr>
+            <a:r>
+              <a:rPr lang="en-US" sz="1250" dirty="0">
+                <a:solidFill>
+                  <a:srgbClr val="404040"/>
+                </a:solidFill>
+                <a:latin typeface="Segoe UI" pitchFamily="34" charset="0"/>
+                <a:ea typeface="Segoe UI" pitchFamily="34" charset="-122"/>
+                <a:cs typeface="Segoe UI" pitchFamily="34" charset="-120"/>
+              </a:rPr>
+              <a:t>Playground, Traces y Monitor del agente · Entra ID Agents (vista y gobierno de identidades) · Microsoft Defender for Cloud: Inventory, Recommendations, Attack Path Analysis, Cloud Security Explorer.</a:t>
+            </a:r>
+            <a:endParaRPr lang="en-US" sz="1250" dirty="0"/>
+          </a:p>
+        </p:txBody>
+      </p:sp>
+      <p:sp>
+        <p:nvSpPr>
+          <p:cNvPr id="11" name="Shape 9"/>
+          <p:cNvSpPr/>
+          <p:nvPr/>
+        </p:nvSpPr>
+        <p:spPr>
+          <a:xfrm>
+            <a:off x="7955280" y="2103120"/>
+            <a:ext cx="3429000" cy="82296"/>
+          </a:xfrm>
+          <a:prstGeom prst="roundRect">
+            <a:avLst/>
+          </a:prstGeom>
+          <a:solidFill>
+            <a:srgbClr val="0078D4"/>
+          </a:solidFill>
+          <a:ln/>
+        </p:spPr>
+      </p:sp>
+      <p:sp>
+        <p:nvSpPr>
+          <p:cNvPr id="12" name="Text 10"/>
+          <p:cNvSpPr/>
+          <p:nvPr/>
+        </p:nvSpPr>
+        <p:spPr>
+          <a:xfrm>
+            <a:off x="7955280" y="2331720"/>
+            <a:ext cx="3429000" cy="457200"/>
+          </a:xfrm>
+          <a:prstGeom prst="rect">
+            <a:avLst/>
+          </a:prstGeom>
+          <a:noFill/>
+          <a:ln/>
+        </p:spPr>
+        <p:txBody>
+          <a:bodyPr wrap="square" lIns="0" tIns="0" rIns="0" bIns="0" rtlCol="0" anchor="ctr"/>
+          <a:lstStyle/>
+          <a:p>
+            <a:pPr indent="0" marL="0">
+              <a:buNone/>
+            </a:pPr>
+            <a:r>
+              <a:rPr lang="en-US" sz="1600" b="1" dirty="0">
+                <a:solidFill>
+                  <a:srgbClr val="1A1A1A"/>
+                </a:solidFill>
+                <a:latin typeface="Segoe UI" pitchFamily="34" charset="0"/>
+                <a:ea typeface="Segoe UI" pitchFamily="34" charset="-122"/>
+                <a:cs typeface="Segoe UI" pitchFamily="34" charset="-120"/>
+              </a:rPr>
+              <a:t>Qué significa para el rollout</a:t>
+            </a:r>
+            <a:endParaRPr lang="en-US" sz="1600" dirty="0"/>
+          </a:p>
+        </p:txBody>
+      </p:sp>
+      <p:sp>
+        <p:nvSpPr>
+          <p:cNvPr id="13" name="Text 11"/>
+          <p:cNvSpPr/>
+          <p:nvPr/>
+        </p:nvSpPr>
+        <p:spPr>
+          <a:xfrm>
+            <a:off x="7955280" y="2788920"/>
+            <a:ext cx="3429000" cy="1371600"/>
+          </a:xfrm>
+          <a:prstGeom prst="rect">
+            <a:avLst/>
+          </a:prstGeom>
+          <a:noFill/>
+          <a:ln/>
+        </p:spPr>
+        <p:txBody>
+          <a:bodyPr wrap="square" lIns="0" tIns="0" rIns="0" bIns="0" rtlCol="0" anchor="ctr"/>
+          <a:lstStyle/>
+          <a:p>
+            <a:pPr indent="0" marL="0">
+              <a:buNone/>
+            </a:pPr>
+            <a:r>
+              <a:rPr lang="en-US" sz="1250" dirty="0">
+                <a:solidFill>
+                  <a:srgbClr val="404040"/>
+                </a:solidFill>
+                <a:latin typeface="Segoe UI" pitchFamily="34" charset="0"/>
+                <a:ea typeface="Segoe UI" pitchFamily="34" charset="-122"/>
+                <a:cs typeface="Segoe UI" pitchFamily="34" charset="-120"/>
+              </a:rPr>
+              <a:t>Lo marcado Preview no tiene SLA y puede cambiar antes de llegar a GA. Úsalo hoy para prototipar y validar valor — no comprometas fechas de producción firmes sobre esas piezas todavía.</a:t>
+            </a:r>
+            <a:endParaRPr lang="en-US" sz="1250" dirty="0"/>
+          </a:p>
+        </p:txBody>
+      </p:sp>
+      <p:sp>
+        <p:nvSpPr>
+          <p:cNvPr id="14" name="Shape 12"/>
+          <p:cNvSpPr/>
+          <p:nvPr/>
+        </p:nvSpPr>
+        <p:spPr>
+          <a:xfrm>
+            <a:off x="548640" y="4526280"/>
+            <a:ext cx="10881360" cy="1691640"/>
+          </a:xfrm>
+          <a:prstGeom prst="roundRect">
+            <a:avLst>
+              <a:gd name="adj" fmla="val 3243"/>
+            </a:avLst>
+          </a:prstGeom>
+          <a:solidFill>
+            <a:srgbClr val="F5F8FC"/>
+          </a:solidFill>
+          <a:ln w="12700">
+            <a:solidFill>
+              <a:srgbClr val="E3E9F2"/>
+            </a:solidFill>
+            <a:prstDash val="solid"/>
+          </a:ln>
+        </p:spPr>
+      </p:sp>
+      <p:sp>
+        <p:nvSpPr>
+          <p:cNvPr id="15" name="Text 13"/>
+          <p:cNvSpPr/>
+          <p:nvPr/>
+        </p:nvSpPr>
+        <p:spPr>
+          <a:xfrm>
+            <a:off x="822960" y="4681728"/>
+            <a:ext cx="10058400" cy="274320"/>
+          </a:xfrm>
+          <a:prstGeom prst="rect">
+            <a:avLst/>
+          </a:prstGeom>
+          <a:noFill/>
+          <a:ln/>
+        </p:spPr>
+        <p:txBody>
+          <a:bodyPr wrap="square" lIns="0" tIns="0" rIns="0" bIns="0" rtlCol="0" anchor="ctr"/>
+          <a:lstStyle/>
+          <a:p>
+            <a:pPr indent="0" marL="0">
+              <a:buNone/>
+            </a:pPr>
+            <a:r>
+              <a:rPr lang="en-US" sz="1050" spc="100" kern="0" dirty="0">
+                <a:solidFill>
+                  <a:srgbClr val="0078D4"/>
+                </a:solidFill>
+                <a:latin typeface="Segoe UI" pitchFamily="34" charset="0"/>
+                <a:ea typeface="Segoe UI" pitchFamily="34" charset="-122"/>
+                <a:cs typeface="Segoe UI" pitchFamily="34" charset="-120"/>
+              </a:rPr>
+              <a:t>RECOMENDACIÓN PARA EL CLIENTE</a:t>
+            </a:r>
+            <a:endParaRPr lang="en-US" sz="1050" dirty="0"/>
+          </a:p>
+        </p:txBody>
+      </p:sp>
+      <p:sp>
+        <p:nvSpPr>
+          <p:cNvPr id="16" name="Text 14"/>
+          <p:cNvSpPr/>
+          <p:nvPr/>
+        </p:nvSpPr>
+        <p:spPr>
+          <a:xfrm>
+            <a:off x="822960" y="4983480"/>
+            <a:ext cx="10332720" cy="1143000"/>
+          </a:xfrm>
+          <a:prstGeom prst="rect">
+            <a:avLst/>
+          </a:prstGeom>
+          <a:noFill/>
+          <a:ln/>
+        </p:spPr>
+        <p:txBody>
+          <a:bodyPr wrap="square" lIns="0" tIns="0" rIns="0" bIns="0" rtlCol="0" anchor="t"/>
+          <a:lstStyle/>
+          <a:p>
+            <a:pPr indent="0" marL="0">
+              <a:buNone/>
+            </a:pPr>
+            <a:r>
+              <a:rPr lang="en-US" sz="1300" i="1" dirty="0">
+                <a:solidFill>
+                  <a:srgbClr val="1A1A1A"/>
+                </a:solidFill>
+                <a:latin typeface="Segoe UI" pitchFamily="34" charset="0"/>
+                <a:ea typeface="Segoe UI" pitchFamily="34" charset="-122"/>
+                <a:cs typeface="Segoe UI" pitchFamily="34" charset="-120"/>
+              </a:rPr>
+              <a:t>“Todo lo que vieron hoy corre sobre Microsoft Foundry y Defender for Cloud reales — no es un mockup. Las piezas en Preview están listas para pilotar; para producción firme, validamos juntos la fecha de disponibilidad general antes de comprometer un plan.”</a:t>
+            </a:r>
+            <a:pPr indent="0" marL="0">
+              <a:buNone/>
+            </a:pPr>
+            <a:r>
+              <a:rPr lang="en-US" sz="1300" b="1" dirty="0">
+                <a:solidFill>
+                  <a:srgbClr val="0A2C6E"/>
+                </a:solidFill>
+                <a:latin typeface="Segoe UI" pitchFamily="34" charset="0"/>
+                <a:ea typeface="Segoe UI" pitchFamily="34" charset="-122"/>
+                <a:cs typeface="Segoe UI" pitchFamily="34" charset="-120"/>
+              </a:rPr>
+              <a:t/>
+            </a:r>
+            <a:pPr indent="0" marL="0">
+              <a:buNone/>
+            </a:pPr>
+            <a:r>
+              <a:rPr lang="en-US" sz="1300" i="1" dirty="0">
+                <a:solidFill>
+                  <a:srgbClr val="1A1A1A"/>
+                </a:solidFill>
+                <a:latin typeface="Segoe UI" pitchFamily="34" charset="0"/>
+                <a:ea typeface="Segoe UI" pitchFamily="34" charset="-122"/>
+                <a:cs typeface="Segoe UI" pitchFamily="34" charset="-120"/>
+              </a:rPr>
+              <a:t/>
+            </a:r>
+            <a:endParaRPr lang="en-US" sz="1300" dirty="0"/>
+          </a:p>
+        </p:txBody>
+      </p:sp>
+    </p:spTree>
+  </p:cSld>
+  <p:clrMapOvr>
+    <a:masterClrMapping/>
+  </p:clrMapOvr>
+</p:sld>
+</file>
+
+<file path=ppt/slides/slide8.xml><?xml version="1.0" encoding="utf-8"?>
+<p:sld xmlns:a="http://schemas.openxmlformats.org/drawingml/2006/main" xmlns:r="http://schemas.openxmlformats.org/officeDocument/2006/relationships" xmlns:p="http://schemas.openxmlformats.org/presentationml/2006/main">
+  <p:cSld name="Slide 5">
+    <p:bg>
+      <p:bgPr>
+        <a:solidFill>
+          <a:srgbClr val="FFFFFF"/>
+        </a:solidFill>
+      </p:bgPr>
+    </p:bg>
+    <p:spTree>
+      <p:nvGrpSpPr>
+        <p:cNvPr id="1" name=""/>
+        <p:cNvGrpSpPr/>
+        <p:nvPr/>
+      </p:nvGrpSpPr>
+      <p:grpSpPr>
+        <a:xfrm>
+          <a:off x="0" y="0"/>
+          <a:ext cx="0" cy="0"/>
+          <a:chOff x="0" y="0"/>
+          <a:chExt cx="0" cy="0"/>
+        </a:xfrm>
+      </p:grpSpPr>
+      <p:sp>
+        <p:nvSpPr>
+          <p:cNvPr id="2" name="Text 0"/>
+          <p:cNvSpPr/>
+          <p:nvPr/>
+        </p:nvSpPr>
+        <p:spPr>
+          <a:xfrm>
+            <a:off x="548640" y="411480"/>
+            <a:ext cx="8229600" cy="320040"/>
+          </a:xfrm>
+          <a:prstGeom prst="rect">
+            <a:avLst/>
+          </a:prstGeom>
+          <a:noFill/>
+          <a:ln/>
+        </p:spPr>
+        <p:txBody>
+          <a:bodyPr wrap="square" lIns="0" tIns="0" rIns="0" bIns="0" rtlCol="0" anchor="ctr"/>
+          <a:lstStyle/>
+          <a:p>
+            <a:pPr indent="0" marL="0">
+              <a:buNone/>
+            </a:pPr>
+            <a:r>
+              <a:rPr lang="en-US" sz="1100" spc="100" kern="0" dirty="0">
+                <a:solidFill>
+                  <a:srgbClr val="0078D4"/>
+                </a:solidFill>
+                <a:latin typeface="Segoe UI" pitchFamily="34" charset="0"/>
+                <a:ea typeface="Segoe UI" pitchFamily="34" charset="-122"/>
+                <a:cs typeface="Segoe UI" pitchFamily="34" charset="-120"/>
+              </a:rPr>
+              <a:t>ANTES DE HABILITARLO EN PRODUCCIÓN</a:t>
+            </a:r>
+            <a:endParaRPr lang="en-US" sz="1100" dirty="0"/>
+          </a:p>
+        </p:txBody>
+      </p:sp>
+      <p:sp>
+        <p:nvSpPr>
+          <p:cNvPr id="3" name="Text 1"/>
+          <p:cNvSpPr/>
+          <p:nvPr/>
+        </p:nvSpPr>
+        <p:spPr>
+          <a:xfrm>
+            <a:off x="548640" y="777240"/>
+            <a:ext cx="10058400" cy="640080"/>
+          </a:xfrm>
+          <a:prstGeom prst="rect">
+            <a:avLst/>
+          </a:prstGeom>
+          <a:noFill/>
+          <a:ln/>
+        </p:spPr>
+        <p:txBody>
+          <a:bodyPr wrap="square" lIns="0" tIns="0" rIns="0" bIns="0" rtlCol="0" anchor="ctr"/>
+          <a:lstStyle/>
+          <a:p>
+            <a:pPr indent="0" marL="0">
+              <a:buNone/>
+            </a:pPr>
+            <a:r>
+              <a:rPr lang="en-US" sz="2800" b="1" dirty="0">
+                <a:solidFill>
+                  <a:srgbClr val="0A2C6E"/>
+                </a:solidFill>
+                <a:latin typeface="Segoe UI" pitchFamily="34" charset="0"/>
+                <a:ea typeface="Segoe UI" pitchFamily="34" charset="-122"/>
+                <a:cs typeface="Segoe UI" pitchFamily="34" charset="-120"/>
+              </a:rPr>
+              <a:t>Costo estimado — escenario de habilitación</a:t>
+            </a:r>
+            <a:endParaRPr lang="en-US" sz="2800" dirty="0"/>
+          </a:p>
+        </p:txBody>
+      </p:sp>
+      <p:sp>
+        <p:nvSpPr>
+          <p:cNvPr id="4" name="Text 2"/>
+          <p:cNvSpPr/>
+          <p:nvPr/>
+        </p:nvSpPr>
+        <p:spPr>
+          <a:xfrm>
+            <a:off x="548640" y="1371600"/>
+            <a:ext cx="10058400" cy="457200"/>
+          </a:xfrm>
+          <a:prstGeom prst="rect">
+            <a:avLst/>
+          </a:prstGeom>
+          <a:noFill/>
+          <a:ln/>
+        </p:spPr>
+        <p:txBody>
+          <a:bodyPr wrap="square" lIns="0" tIns="0" rIns="0" bIns="0" rtlCol="0" anchor="ctr"/>
+          <a:lstStyle/>
+          <a:p>
+            <a:pPr indent="0" marL="0">
+              <a:buNone/>
+            </a:pPr>
+            <a:r>
+              <a:rPr lang="en-US" sz="1500" dirty="0">
+                <a:solidFill>
+                  <a:srgbClr val="404040"/>
+                </a:solidFill>
+                <a:latin typeface="Segoe UI" pitchFamily="34" charset="0"/>
+                <a:ea typeface="Segoe UI" pitchFamily="34" charset="-122"/>
+                <a:cs typeface="Segoe UI" pitchFamily="34" charset="-120"/>
+              </a:rPr>
+              <a:t>Separamos lo medido en vivo en este ambiente (confiable) de lo que depende del volumen del cliente</a:t>
+            </a:r>
+            <a:endParaRPr lang="en-US" sz="1500" dirty="0"/>
+          </a:p>
+        </p:txBody>
+      </p:sp>
+      <p:sp>
+        <p:nvSpPr>
+          <p:cNvPr id="5" name="Shape 3"/>
+          <p:cNvSpPr/>
+          <p:nvPr/>
+        </p:nvSpPr>
+        <p:spPr>
+          <a:xfrm>
+            <a:off x="548640" y="2148840"/>
+            <a:ext cx="5166360" cy="4069080"/>
+          </a:xfrm>
+          <a:prstGeom prst="roundRect">
+            <a:avLst>
+              <a:gd name="adj" fmla="val 1798"/>
+            </a:avLst>
+          </a:prstGeom>
+          <a:solidFill>
+            <a:srgbClr val="F5F8FC"/>
+          </a:solidFill>
+          <a:ln w="12700">
+            <a:solidFill>
+              <a:srgbClr val="E3E9F2"/>
+            </a:solidFill>
+            <a:prstDash val="solid"/>
+          </a:ln>
+        </p:spPr>
+      </p:sp>
+      <p:sp>
+        <p:nvSpPr>
+          <p:cNvPr id="6" name="Text 4"/>
+          <p:cNvSpPr/>
+          <p:nvPr/>
+        </p:nvSpPr>
+        <p:spPr>
+          <a:xfrm>
+            <a:off x="914400" y="2377440"/>
+            <a:ext cx="4434840" cy="320040"/>
+          </a:xfrm>
+          <a:prstGeom prst="rect">
+            <a:avLst/>
+          </a:prstGeom>
+          <a:noFill/>
+          <a:ln/>
+        </p:spPr>
+        <p:txBody>
+          <a:bodyPr wrap="square" lIns="0" tIns="0" rIns="0" bIns="0" rtlCol="0" anchor="ctr"/>
+          <a:lstStyle/>
+          <a:p>
+            <a:pPr indent="0" marL="0">
+              <a:buNone/>
+            </a:pPr>
+            <a:r>
+              <a:rPr lang="en-US" sz="1200" b="1" spc="100" kern="0" dirty="0">
+                <a:solidFill>
+                  <a:srgbClr val="0078D4"/>
+                </a:solidFill>
+                <a:latin typeface="Segoe UI" pitchFamily="34" charset="0"/>
+                <a:ea typeface="Segoe UI" pitchFamily="34" charset="-122"/>
+                <a:cs typeface="Segoe UI" pitchFamily="34" charset="-120"/>
+              </a:rPr>
+              <a:t>CONSUMO VARIABLE</a:t>
+            </a:r>
+            <a:endParaRPr lang="en-US" sz="1200" dirty="0"/>
+          </a:p>
+        </p:txBody>
+      </p:sp>
+      <p:sp>
+        <p:nvSpPr>
+          <p:cNvPr id="7" name="Text 5"/>
+          <p:cNvSpPr/>
+          <p:nvPr/>
+        </p:nvSpPr>
+        <p:spPr>
+          <a:xfrm>
+            <a:off x="914400" y="2697480"/>
+            <a:ext cx="4434840" cy="365760"/>
+          </a:xfrm>
+          <a:prstGeom prst="rect">
+            <a:avLst/>
+          </a:prstGeom>
+          <a:noFill/>
+          <a:ln/>
+        </p:spPr>
+        <p:txBody>
+          <a:bodyPr wrap="square" lIns="0" tIns="0" rIns="0" bIns="0" rtlCol="0" anchor="ctr"/>
+          <a:lstStyle/>
+          <a:p>
+            <a:pPr indent="0" marL="0">
+              <a:buNone/>
+            </a:pPr>
+            <a:r>
+              <a:rPr lang="en-US" sz="1600" b="1" dirty="0">
+                <a:solidFill>
+                  <a:srgbClr val="1A1A1A"/>
+                </a:solidFill>
+                <a:latin typeface="Segoe UI" pitchFamily="34" charset="0"/>
+                <a:ea typeface="Segoe UI" pitchFamily="34" charset="-122"/>
+                <a:cs typeface="Segoe UI" pitchFamily="34" charset="-120"/>
+              </a:rPr>
+              <a:t>Costo real medido por ejecución</a:t>
+            </a:r>
+            <a:endParaRPr lang="en-US" sz="1600" dirty="0"/>
+          </a:p>
+        </p:txBody>
+      </p:sp>
+      <p:sp>
+        <p:nvSpPr>
+          <p:cNvPr id="8" name="Text 6"/>
+          <p:cNvSpPr/>
+          <p:nvPr/>
+        </p:nvSpPr>
+        <p:spPr>
+          <a:xfrm>
+            <a:off x="914400" y="3154680"/>
+            <a:ext cx="4434840" cy="914400"/>
+          </a:xfrm>
+          <a:prstGeom prst="rect">
+            <a:avLst/>
+          </a:prstGeom>
+          <a:noFill/>
+          <a:ln/>
+        </p:spPr>
+        <p:txBody>
+          <a:bodyPr wrap="square" lIns="0" tIns="0" rIns="0" bIns="0" rtlCol="0" anchor="ctr"/>
+          <a:lstStyle/>
+          <a:p>
+            <a:pPr indent="0" marL="0">
+              <a:buNone/>
+            </a:pPr>
+            <a:r>
+              <a:rPr lang="en-US" sz="1250" dirty="0">
+                <a:solidFill>
+                  <a:srgbClr val="404040"/>
+                </a:solidFill>
+                <a:latin typeface="Segoe UI" pitchFamily="34" charset="0"/>
+                <a:ea typeface="Segoe UI" pitchFamily="34" charset="-122"/>
+                <a:cs typeface="Segoe UI" pitchFamily="34" charset="-120"/>
+              </a:rPr>
+              <a:t>Promedio real observado en los Traces de esta demo: modelo (gpt-4o) + recuperación de la knowledge base. No es un estimado de catálogo — es lo que Azure facturó.</a:t>
+            </a:r>
+            <a:endParaRPr lang="en-US" sz="1250" dirty="0"/>
+          </a:p>
+        </p:txBody>
+      </p:sp>
+      <p:sp>
+        <p:nvSpPr>
+          <p:cNvPr id="9" name="Text 7"/>
+          <p:cNvSpPr/>
+          <p:nvPr/>
+        </p:nvSpPr>
+        <p:spPr>
+          <a:xfrm>
+            <a:off x="914400" y="4251960"/>
+            <a:ext cx="1463040" cy="457200"/>
+          </a:xfrm>
+          <a:prstGeom prst="rect">
+            <a:avLst/>
+          </a:prstGeom>
+          <a:noFill/>
+          <a:ln/>
+        </p:spPr>
+        <p:txBody>
+          <a:bodyPr wrap="square" lIns="0" tIns="0" rIns="0" bIns="0" rtlCol="0" anchor="ctr"/>
+          <a:lstStyle/>
+          <a:p>
+            <a:pPr indent="0" marL="0">
+              <a:buNone/>
+            </a:pPr>
+            <a:r>
+              <a:rPr lang="en-US" sz="2400" b="1" dirty="0">
+                <a:solidFill>
+                  <a:srgbClr val="0A2C6E"/>
+                </a:solidFill>
+                <a:latin typeface="Segoe UI" pitchFamily="34" charset="0"/>
+                <a:ea typeface="Segoe UI" pitchFamily="34" charset="-122"/>
+                <a:cs typeface="Segoe UI" pitchFamily="34" charset="-120"/>
+              </a:rPr>
+              <a:t>$0.012</a:t>
+            </a:r>
+            <a:endParaRPr lang="en-US" sz="2400" dirty="0"/>
+          </a:p>
+        </p:txBody>
+      </p:sp>
+      <p:sp>
+        <p:nvSpPr>
+          <p:cNvPr id="10" name="Text 8"/>
+          <p:cNvSpPr/>
+          <p:nvPr/>
+        </p:nvSpPr>
+        <p:spPr>
+          <a:xfrm>
+            <a:off x="2377440" y="4325112"/>
+            <a:ext cx="2971800" cy="457200"/>
+          </a:xfrm>
+          <a:prstGeom prst="rect">
+            <a:avLst/>
+          </a:prstGeom>
+          <a:noFill/>
+          <a:ln/>
+        </p:spPr>
+        <p:txBody>
+          <a:bodyPr wrap="square" lIns="0" tIns="0" rIns="0" bIns="0" rtlCol="0" anchor="ctr"/>
+          <a:lstStyle/>
+          <a:p>
+            <a:pPr indent="0" marL="0">
+              <a:buNone/>
+            </a:pPr>
+            <a:r>
+              <a:rPr lang="en-US" sz="1150" dirty="0">
+                <a:solidFill>
+                  <a:srgbClr val="404040"/>
+                </a:solidFill>
+                <a:latin typeface="Segoe UI" pitchFamily="34" charset="0"/>
+                <a:ea typeface="Segoe UI" pitchFamily="34" charset="-122"/>
+                <a:cs typeface="Segoe UI" pitchFamily="34" charset="-120"/>
+              </a:rPr>
+              <a:t>promedio por auditoría de factura</a:t>
+            </a:r>
+            <a:endParaRPr lang="en-US" sz="1150" dirty="0"/>
+          </a:p>
+        </p:txBody>
+      </p:sp>
+      <p:sp>
+        <p:nvSpPr>
+          <p:cNvPr id="11" name="Text 9"/>
+          <p:cNvSpPr/>
+          <p:nvPr/>
+        </p:nvSpPr>
+        <p:spPr>
+          <a:xfrm>
+            <a:off x="914400" y="4873752"/>
+            <a:ext cx="1463040" cy="457200"/>
+          </a:xfrm>
+          <a:prstGeom prst="rect">
+            <a:avLst/>
+          </a:prstGeom>
+          <a:noFill/>
+          <a:ln/>
+        </p:spPr>
+        <p:txBody>
+          <a:bodyPr wrap="square" lIns="0" tIns="0" rIns="0" bIns="0" rtlCol="0" anchor="ctr"/>
+          <a:lstStyle/>
+          <a:p>
+            <a:pPr indent="0" marL="0">
+              <a:buNone/>
+            </a:pPr>
+            <a:r>
+              <a:rPr lang="en-US" sz="2400" b="1" dirty="0">
+                <a:solidFill>
+                  <a:srgbClr val="0A2C6E"/>
+                </a:solidFill>
+                <a:latin typeface="Segoe UI" pitchFamily="34" charset="0"/>
+                <a:ea typeface="Segoe UI" pitchFamily="34" charset="-122"/>
+                <a:cs typeface="Segoe UI" pitchFamily="34" charset="-120"/>
+              </a:rPr>
+              <a:t>$0.60</a:t>
+            </a:r>
+            <a:endParaRPr lang="en-US" sz="2400" dirty="0"/>
+          </a:p>
+        </p:txBody>
+      </p:sp>
+      <p:sp>
+        <p:nvSpPr>
+          <p:cNvPr id="12" name="Text 10"/>
+          <p:cNvSpPr/>
+          <p:nvPr/>
+        </p:nvSpPr>
+        <p:spPr>
+          <a:xfrm>
+            <a:off x="2377440" y="4946904"/>
+            <a:ext cx="2971800" cy="457200"/>
+          </a:xfrm>
+          <a:prstGeom prst="rect">
+            <a:avLst/>
+          </a:prstGeom>
+          <a:noFill/>
+          <a:ln/>
+        </p:spPr>
+        <p:txBody>
+          <a:bodyPr wrap="square" lIns="0" tIns="0" rIns="0" bIns="0" rtlCol="0" anchor="ctr"/>
+          <a:lstStyle/>
+          <a:p>
+            <a:pPr indent="0" marL="0">
+              <a:buNone/>
+            </a:pPr>
+            <a:r>
+              <a:rPr lang="en-US" sz="1150" dirty="0">
+                <a:solidFill>
+                  <a:srgbClr val="404040"/>
+                </a:solidFill>
+                <a:latin typeface="Segoe UI" pitchFamily="34" charset="0"/>
+                <a:ea typeface="Segoe UI" pitchFamily="34" charset="-122"/>
+                <a:cs typeface="Segoe UI" pitchFamily="34" charset="-120"/>
+              </a:rPr>
+              <a:t>proyectado a 50 facturas/mes</a:t>
+            </a:r>
+            <a:endParaRPr lang="en-US" sz="1150" dirty="0"/>
+          </a:p>
+        </p:txBody>
+      </p:sp>
+      <p:sp>
+        <p:nvSpPr>
+          <p:cNvPr id="13" name="Text 11"/>
+          <p:cNvSpPr/>
+          <p:nvPr/>
+        </p:nvSpPr>
+        <p:spPr>
+          <a:xfrm>
+            <a:off x="914400" y="5495544"/>
+            <a:ext cx="1463040" cy="457200"/>
+          </a:xfrm>
+          <a:prstGeom prst="rect">
+            <a:avLst/>
+          </a:prstGeom>
+          <a:noFill/>
+          <a:ln/>
+        </p:spPr>
+        <p:txBody>
+          <a:bodyPr wrap="square" lIns="0" tIns="0" rIns="0" bIns="0" rtlCol="0" anchor="ctr"/>
+          <a:lstStyle/>
+          <a:p>
+            <a:pPr indent="0" marL="0">
+              <a:buNone/>
+            </a:pPr>
+            <a:r>
+              <a:rPr lang="en-US" sz="2400" b="1" dirty="0">
+                <a:solidFill>
+                  <a:srgbClr val="0A2C6E"/>
+                </a:solidFill>
+                <a:latin typeface="Segoe UI" pitchFamily="34" charset="0"/>
+                <a:ea typeface="Segoe UI" pitchFamily="34" charset="-122"/>
+                <a:cs typeface="Segoe UI" pitchFamily="34" charset="-120"/>
+              </a:rPr>
+              <a:t>$24</a:t>
+            </a:r>
+            <a:endParaRPr lang="en-US" sz="2400" dirty="0"/>
+          </a:p>
+        </p:txBody>
+      </p:sp>
+      <p:sp>
+        <p:nvSpPr>
+          <p:cNvPr id="14" name="Text 12"/>
+          <p:cNvSpPr/>
+          <p:nvPr/>
+        </p:nvSpPr>
+        <p:spPr>
+          <a:xfrm>
+            <a:off x="2377440" y="5568696"/>
+            <a:ext cx="2971800" cy="457200"/>
+          </a:xfrm>
+          <a:prstGeom prst="rect">
+            <a:avLst/>
+          </a:prstGeom>
+          <a:noFill/>
+          <a:ln/>
+        </p:spPr>
+        <p:txBody>
+          <a:bodyPr wrap="square" lIns="0" tIns="0" rIns="0" bIns="0" rtlCol="0" anchor="ctr"/>
+          <a:lstStyle/>
+          <a:p>
+            <a:pPr indent="0" marL="0">
+              <a:buNone/>
+            </a:pPr>
+            <a:r>
+              <a:rPr lang="en-US" sz="1150" dirty="0">
+                <a:solidFill>
+                  <a:srgbClr val="404040"/>
+                </a:solidFill>
+                <a:latin typeface="Segoe UI" pitchFamily="34" charset="0"/>
+                <a:ea typeface="Segoe UI" pitchFamily="34" charset="-122"/>
+                <a:cs typeface="Segoe UI" pitchFamily="34" charset="-120"/>
+              </a:rPr>
+              <a:t>proyectado a 2,000 facturas/mes</a:t>
+            </a:r>
+            <a:endParaRPr lang="en-US" sz="1150" dirty="0"/>
+          </a:p>
+        </p:txBody>
+      </p:sp>
+      <p:sp>
+        <p:nvSpPr>
+          <p:cNvPr id="15" name="Shape 13"/>
+          <p:cNvSpPr/>
+          <p:nvPr/>
+        </p:nvSpPr>
+        <p:spPr>
+          <a:xfrm>
+            <a:off x="5943600" y="2148840"/>
+            <a:ext cx="5486400" cy="4069080"/>
+          </a:xfrm>
+          <a:prstGeom prst="roundRect">
+            <a:avLst>
+              <a:gd name="adj" fmla="val 1798"/>
+            </a:avLst>
+          </a:prstGeom>
+          <a:solidFill>
+            <a:srgbClr val="0A2C6E"/>
+          </a:solidFill>
+          <a:ln/>
+        </p:spPr>
+      </p:sp>
+      <p:sp>
+        <p:nvSpPr>
+          <p:cNvPr id="16" name="Text 14"/>
+          <p:cNvSpPr/>
+          <p:nvPr/>
+        </p:nvSpPr>
+        <p:spPr>
+          <a:xfrm>
+            <a:off x="6309360" y="2377440"/>
+            <a:ext cx="4754880" cy="320040"/>
+          </a:xfrm>
+          <a:prstGeom prst="rect">
+            <a:avLst/>
+          </a:prstGeom>
+          <a:noFill/>
+          <a:ln/>
+        </p:spPr>
+        <p:txBody>
+          <a:bodyPr wrap="square" lIns="0" tIns="0" rIns="0" bIns="0" rtlCol="0" anchor="ctr"/>
+          <a:lstStyle/>
+          <a:p>
+            <a:pPr indent="0" marL="0">
+              <a:buNone/>
+            </a:pPr>
+            <a:r>
+              <a:rPr lang="en-US" sz="1200" b="1" spc="100" kern="0" dirty="0">
+                <a:solidFill>
+                  <a:srgbClr val="5CC6F5"/>
+                </a:solidFill>
+                <a:latin typeface="Segoe UI" pitchFamily="34" charset="0"/>
+                <a:ea typeface="Segoe UI" pitchFamily="34" charset="-122"/>
+                <a:cs typeface="Segoe UI" pitchFamily="34" charset="-120"/>
+              </a:rPr>
+              <a:t>PLATAFORMA Y SEGURIDAD</a:t>
+            </a:r>
+            <a:endParaRPr lang="en-US" sz="1200" dirty="0"/>
+          </a:p>
+        </p:txBody>
+      </p:sp>
+      <p:sp>
+        <p:nvSpPr>
+          <p:cNvPr id="17" name="Text 15"/>
+          <p:cNvSpPr/>
+          <p:nvPr/>
+        </p:nvSpPr>
+        <p:spPr>
+          <a:xfrm>
+            <a:off x="6309360" y="2697480"/>
+            <a:ext cx="4754880" cy="365760"/>
+          </a:xfrm>
+          <a:prstGeom prst="rect">
+            <a:avLst/>
+          </a:prstGeom>
+          <a:noFill/>
+          <a:ln/>
+        </p:spPr>
+        <p:txBody>
+          <a:bodyPr wrap="square" lIns="0" tIns="0" rIns="0" bIns="0" rtlCol="0" anchor="ctr"/>
+          <a:lstStyle/>
+          <a:p>
+            <a:pPr indent="0" marL="0">
+              <a:buNone/>
+            </a:pPr>
+            <a:r>
+              <a:rPr lang="en-US" sz="1600" b="1" dirty="0">
+                <a:solidFill>
+                  <a:srgbClr val="FFFFFF"/>
+                </a:solidFill>
+                <a:latin typeface="Segoe UI" pitchFamily="34" charset="0"/>
+                <a:ea typeface="Segoe UI" pitchFamily="34" charset="-122"/>
+                <a:cs typeface="Segoe UI" pitchFamily="34" charset="-120"/>
+              </a:rPr>
+              <a:t>A confirmar con la calculadora de Azure</a:t>
+            </a:r>
+            <a:endParaRPr lang="en-US" sz="1600" dirty="0"/>
+          </a:p>
+        </p:txBody>
+      </p:sp>
+      <p:sp>
+        <p:nvSpPr>
+          <p:cNvPr id="18" name="Text 16"/>
+          <p:cNvSpPr/>
+          <p:nvPr/>
+        </p:nvSpPr>
+        <p:spPr>
+          <a:xfrm>
+            <a:off x="6309360" y="3154680"/>
+            <a:ext cx="4754880" cy="822960"/>
+          </a:xfrm>
+          <a:prstGeom prst="rect">
+            <a:avLst/>
+          </a:prstGeom>
+          <a:noFill/>
+          <a:ln/>
+        </p:spPr>
+        <p:txBody>
+          <a:bodyPr wrap="square" lIns="0" tIns="0" rIns="0" bIns="0" rtlCol="0" anchor="ctr"/>
+          <a:lstStyle/>
+          <a:p>
+            <a:pPr indent="0" marL="0">
+              <a:buNone/>
+            </a:pPr>
+            <a:r>
+              <a:rPr lang="en-US" sz="1250" dirty="0">
+                <a:solidFill>
+                  <a:srgbClr val="CFE3FA"/>
+                </a:solidFill>
+                <a:latin typeface="Segoe UI" pitchFamily="34" charset="0"/>
+                <a:ea typeface="Segoe UI" pitchFamily="34" charset="-122"/>
+                <a:cs typeface="Segoe UI" pitchFamily="34" charset="-120"/>
+              </a:rPr>
+              <a:t>Azure AI Search, Application Insights y el plan “AI” de Defender for Cloud dependen del volumen y el tier elegido — no cotizar un número exacto sin confirmarlo en vivo con el cliente.</a:t>
+            </a:r>
+            <a:endParaRPr lang="en-US" sz="1250" dirty="0"/>
+          </a:p>
+        </p:txBody>
+      </p:sp>
+      <p:sp>
+        <p:nvSpPr>
+          <p:cNvPr id="19" name="Text 17"/>
+          <p:cNvSpPr/>
+          <p:nvPr/>
+        </p:nvSpPr>
+        <p:spPr>
+          <a:xfrm>
+            <a:off x="6309360" y="4160520"/>
+            <a:ext cx="2011680" cy="548640"/>
+          </a:xfrm>
+          <a:prstGeom prst="rect">
+            <a:avLst/>
+          </a:prstGeom>
+          <a:noFill/>
+          <a:ln/>
+        </p:spPr>
+        <p:txBody>
+          <a:bodyPr wrap="square" lIns="0" tIns="0" rIns="0" bIns="0" rtlCol="0" anchor="ctr"/>
+          <a:lstStyle/>
+          <a:p>
+            <a:pPr indent="0" marL="0">
+              <a:buNone/>
+            </a:pPr>
+            <a:r>
+              <a:rPr lang="en-US" sz="3000" b="1" dirty="0">
+                <a:solidFill>
+                  <a:srgbClr val="00BBC3"/>
+                </a:solidFill>
+                <a:latin typeface="Segoe UI" pitchFamily="34" charset="0"/>
+                <a:ea typeface="Segoe UI" pitchFamily="34" charset="-122"/>
+                <a:cs typeface="Segoe UI" pitchFamily="34" charset="-120"/>
+              </a:rPr>
+              <a:t>Gratis</a:t>
+            </a:r>
+            <a:endParaRPr lang="en-US" sz="3000" dirty="0"/>
+          </a:p>
+        </p:txBody>
+      </p:sp>
+      <p:sp>
+        <p:nvSpPr>
+          <p:cNvPr id="20" name="Text 18"/>
+          <p:cNvSpPr/>
+          <p:nvPr/>
+        </p:nvSpPr>
+        <p:spPr>
+          <a:xfrm>
+            <a:off x="6309360" y="4727448"/>
+            <a:ext cx="4754880" cy="320040"/>
+          </a:xfrm>
+          <a:prstGeom prst="rect">
+            <a:avLst/>
+          </a:prstGeom>
+          <a:noFill/>
+          <a:ln/>
+        </p:spPr>
+        <p:txBody>
+          <a:bodyPr wrap="square" lIns="0" tIns="0" rIns="0" bIns="0" rtlCol="0" anchor="ctr"/>
+          <a:lstStyle/>
+          <a:p>
+            <a:pPr indent="0" marL="0">
+              <a:buNone/>
+            </a:pPr>
+            <a:r>
+              <a:rPr lang="en-US" sz="1150" dirty="0">
+                <a:solidFill>
+                  <a:srgbClr val="A9C2E8"/>
+                </a:solidFill>
+                <a:latin typeface="Segoe UI" pitchFamily="34" charset="0"/>
+                <a:ea typeface="Segoe UI" pitchFamily="34" charset="-122"/>
+                <a:cs typeface="Segoe UI" pitchFamily="34" charset="-120"/>
+              </a:rPr>
+              <a:t>30 días de trial — Defender for Cloud (AI) activo hoy</a:t>
+            </a:r>
+            <a:endParaRPr lang="en-US" sz="1150" dirty="0"/>
+          </a:p>
+        </p:txBody>
+      </p:sp>
+      <p:sp>
+        <p:nvSpPr>
+          <p:cNvPr id="21" name="Text 19"/>
+          <p:cNvSpPr/>
+          <p:nvPr/>
+        </p:nvSpPr>
+        <p:spPr>
+          <a:xfrm>
+            <a:off x="6309360" y="5166360"/>
+            <a:ext cx="2011680" cy="548640"/>
+          </a:xfrm>
+          <a:prstGeom prst="rect">
+            <a:avLst/>
+          </a:prstGeom>
+          <a:noFill/>
+          <a:ln/>
+        </p:spPr>
+        <p:txBody>
+          <a:bodyPr wrap="square" lIns="0" tIns="0" rIns="0" bIns="0" rtlCol="0" anchor="ctr"/>
+          <a:lstStyle/>
+          <a:p>
+            <a:pPr indent="0" marL="0">
+              <a:buNone/>
+            </a:pPr>
+            <a:r>
+              <a:rPr lang="en-US" sz="3000" b="1" dirty="0">
+                <a:solidFill>
+                  <a:srgbClr val="00BBC3"/>
+                </a:solidFill>
+                <a:latin typeface="Segoe UI" pitchFamily="34" charset="0"/>
+                <a:ea typeface="Segoe UI" pitchFamily="34" charset="-122"/>
+                <a:cs typeface="Segoe UI" pitchFamily="34" charset="-120"/>
+              </a:rPr>
+              <a:t>Por uso</a:t>
+            </a:r>
+            <a:endParaRPr lang="en-US" sz="3000" dirty="0"/>
+          </a:p>
+        </p:txBody>
+      </p:sp>
+      <p:sp>
+        <p:nvSpPr>
+          <p:cNvPr id="22" name="Text 20"/>
+          <p:cNvSpPr/>
+          <p:nvPr/>
+        </p:nvSpPr>
+        <p:spPr>
+          <a:xfrm>
+            <a:off x="6309360" y="5733288"/>
+            <a:ext cx="4754880" cy="320040"/>
+          </a:xfrm>
+          <a:prstGeom prst="rect">
+            <a:avLst/>
+          </a:prstGeom>
+          <a:noFill/>
+          <a:ln/>
+        </p:spPr>
+        <p:txBody>
+          <a:bodyPr wrap="square" lIns="0" tIns="0" rIns="0" bIns="0" rtlCol="0" anchor="ctr"/>
+          <a:lstStyle/>
+          <a:p>
+            <a:pPr indent="0" marL="0">
+              <a:buNone/>
+            </a:pPr>
+            <a:r>
+              <a:rPr lang="en-US" sz="1150" dirty="0">
+                <a:solidFill>
+                  <a:srgbClr val="A9C2E8"/>
+                </a:solidFill>
+                <a:latin typeface="Segoe UI" pitchFamily="34" charset="0"/>
+                <a:ea typeface="Segoe UI" pitchFamily="34" charset="-122"/>
+                <a:cs typeface="Segoe UI" pitchFamily="34" charset="-120"/>
+              </a:rPr>
+              <a:t>Azure AI Search Serverless + App Insights, por GB</a:t>
+            </a:r>
+            <a:endParaRPr lang="en-US" sz="1150" dirty="0"/>
+          </a:p>
+        </p:txBody>
+      </p:sp>
+    </p:spTree>
+  </p:cSld>
+  <p:clrMapOvr>
+    <a:masterClrMapping/>
+  </p:clrMapOvr>
+</p:sld>
+</file>
+
+<file path=ppt/slides/slide9.xml><?xml version="1.0" encoding="utf-8"?>
+<p:sld xmlns:a="http://schemas.openxmlformats.org/drawingml/2006/main" xmlns:r="http://schemas.openxmlformats.org/officeDocument/2006/relationships" xmlns:p="http://schemas.openxmlformats.org/presentationml/2006/main">
   <p:cSld name="Slide 7">
     <p:bg>
       <p:bgPr>
